--- a/catalog/editorial/templates/ed_bullets_columns_5.pptx
+++ b/catalog/editorial/templates/ed_bullets_columns_5.pptx
@@ -3577,7 +3577,7 @@
           <a:noFill/>
         </p:spPr>
         <p:txBody>
-          <a:bodyPr wrap="square" lIns="18288" rIns="18288" tIns="13716" bIns="13716">
+          <a:bodyPr wrap="square" anchor="t" lIns="18288" rIns="18288" tIns="13716" bIns="13716">
             <a:noAutofit/>
           </a:bodyPr>
           <a:lstStyle/>
@@ -3632,7 +3632,7 @@
           <a:noFill/>
         </p:spPr>
         <p:txBody>
-          <a:bodyPr wrap="square" lIns="18288" rIns="18288" tIns="13716" bIns="13716">
+          <a:bodyPr wrap="square" anchor="t" lIns="18288" rIns="18288" tIns="13716" bIns="13716">
             <a:noAutofit/>
           </a:bodyPr>
           <a:lstStyle/>
@@ -3687,7 +3687,7 @@
           <a:noFill/>
         </p:spPr>
         <p:txBody>
-          <a:bodyPr wrap="square" lIns="18288" rIns="18288" tIns="13716" bIns="13716">
+          <a:bodyPr wrap="square" anchor="t" lIns="18288" rIns="18288" tIns="13716" bIns="13716">
             <a:noAutofit/>
           </a:bodyPr>
           <a:lstStyle/>
@@ -3786,7 +3786,7 @@
           <a:noFill/>
         </p:spPr>
         <p:txBody>
-          <a:bodyPr wrap="square" lIns="18288" rIns="18288" tIns="13716" bIns="13716">
+          <a:bodyPr wrap="square" anchor="t" lIns="18288" rIns="18288" tIns="13716" bIns="13716">
             <a:noAutofit/>
           </a:bodyPr>
           <a:lstStyle/>
@@ -3841,7 +3841,7 @@
           <a:noFill/>
         </p:spPr>
         <p:txBody>
-          <a:bodyPr wrap="square" lIns="18288" rIns="18288" tIns="13716" bIns="13716">
+          <a:bodyPr wrap="square" anchor="t" lIns="18288" rIns="18288" tIns="13716" bIns="13716">
             <a:noAutofit/>
           </a:bodyPr>
           <a:lstStyle/>
@@ -3940,7 +3940,7 @@
           <a:noFill/>
         </p:spPr>
         <p:txBody>
-          <a:bodyPr wrap="square" lIns="18288" rIns="18288" tIns="13716" bIns="13716">
+          <a:bodyPr wrap="square" anchor="t" lIns="18288" rIns="18288" tIns="13716" bIns="13716">
             <a:noAutofit/>
           </a:bodyPr>
           <a:lstStyle/>
@@ -3995,7 +3995,7 @@
           <a:noFill/>
         </p:spPr>
         <p:txBody>
-          <a:bodyPr wrap="square" lIns="18288" rIns="18288" tIns="13716" bIns="13716">
+          <a:bodyPr wrap="square" anchor="t" lIns="18288" rIns="18288" tIns="13716" bIns="13716">
             <a:noAutofit/>
           </a:bodyPr>
           <a:lstStyle/>
@@ -4094,7 +4094,7 @@
           <a:noFill/>
         </p:spPr>
         <p:txBody>
-          <a:bodyPr wrap="square" lIns="18288" rIns="18288" tIns="13716" bIns="13716">
+          <a:bodyPr wrap="square" anchor="t" lIns="18288" rIns="18288" tIns="13716" bIns="13716">
             <a:noAutofit/>
           </a:bodyPr>
           <a:lstStyle/>
@@ -4149,7 +4149,7 @@
           <a:noFill/>
         </p:spPr>
         <p:txBody>
-          <a:bodyPr wrap="square" lIns="18288" rIns="18288" tIns="13716" bIns="13716">
+          <a:bodyPr wrap="square" anchor="t" lIns="18288" rIns="18288" tIns="13716" bIns="13716">
             <a:noAutofit/>
           </a:bodyPr>
           <a:lstStyle/>
@@ -4248,7 +4248,7 @@
           <a:noFill/>
         </p:spPr>
         <p:txBody>
-          <a:bodyPr wrap="square" lIns="18288" rIns="18288" tIns="13716" bIns="13716">
+          <a:bodyPr wrap="square" anchor="t" lIns="18288" rIns="18288" tIns="13716" bIns="13716">
             <a:noAutofit/>
           </a:bodyPr>
           <a:lstStyle/>
@@ -4303,7 +4303,7 @@
           <a:noFill/>
         </p:spPr>
         <p:txBody>
-          <a:bodyPr wrap="square" lIns="18288" rIns="18288" tIns="13716" bIns="13716">
+          <a:bodyPr wrap="square" anchor="t" lIns="18288" rIns="18288" tIns="13716" bIns="13716">
             <a:noAutofit/>
           </a:bodyPr>
           <a:lstStyle/>
@@ -4402,7 +4402,7 @@
           <a:noFill/>
         </p:spPr>
         <p:txBody>
-          <a:bodyPr wrap="square" lIns="18288" rIns="18288" tIns="13716" bIns="13716">
+          <a:bodyPr wrap="square" anchor="t" lIns="18288" rIns="18288" tIns="13716" bIns="13716">
             <a:noAutofit/>
           </a:bodyPr>
           <a:lstStyle/>
@@ -4457,7 +4457,7 @@
           <a:noFill/>
         </p:spPr>
         <p:txBody>
-          <a:bodyPr wrap="square" lIns="18288" rIns="18288" tIns="13716" bIns="13716">
+          <a:bodyPr wrap="square" anchor="t" lIns="18288" rIns="18288" tIns="13716" bIns="13716">
             <a:noAutofit/>
           </a:bodyPr>
           <a:lstStyle/>
@@ -4556,7 +4556,7 @@
           <a:noFill/>
         </p:spPr>
         <p:txBody>
-          <a:bodyPr wrap="square" lIns="18288" rIns="18288" tIns="13716" bIns="13716">
+          <a:bodyPr wrap="square" anchor="t" lIns="18288" rIns="18288" tIns="13716" bIns="13716">
             <a:noAutofit/>
           </a:bodyPr>
           <a:lstStyle/>
@@ -4611,7 +4611,7 @@
           <a:noFill/>
         </p:spPr>
         <p:txBody>
-          <a:bodyPr wrap="square" lIns="18288" rIns="18288" tIns="13716" bIns="13716">
+          <a:bodyPr wrap="square" anchor="t" lIns="18288" rIns="18288" tIns="13716" bIns="13716">
             <a:noAutofit/>
           </a:bodyPr>
           <a:lstStyle/>
